--- a/docs/MasterGame_仕様提案_MVP分割.pptx
+++ b/docs/MasterGame_仕様提案_MVP分割.pptx
@@ -2765,7 +2765,7 @@
                 <a:ea typeface="Meiryo" pitchFamily="34" charset="-122"/>
                 <a:cs typeface="Meiryo" pitchFamily="34" charset="-120"/>
               </a:rPr>
-              <a:t>株式会社クリティカルヒット ｜ 2026.05 ｜ 既存3資料（構想・サービス紹介・開発要件）に基づく</a:t>
+              <a:t>2026.05 ｜ 既存3資料（構想・サービス紹介・開発要件）に基づく</a:t>
             </a:r>
             <a:endParaRPr lang="en-US" sz="1050" dirty="0"/>
           </a:p>

--- a/docs/MasterGame_仕様提案_MVP分割.pptx
+++ b/docs/MasterGame_仕様提案_MVP分割.pptx
@@ -18092,7 +18092,7 @@
         </p:nvSpPr>
         <p:spPr>
           <a:xfrm>
-            <a:off x="3840480" y="2377440"/>
+            <a:off x="3840480" y="2560320"/>
             <a:ext cx="640080" cy="0"/>
           </a:xfrm>
           <a:prstGeom prst="line">
@@ -18116,8 +18116,8 @@
         </p:nvSpPr>
         <p:spPr>
           <a:xfrm>
-            <a:off x="3383280" y="1828800"/>
-            <a:ext cx="1554480" cy="320040"/>
+            <a:off x="3246120" y="1874520"/>
+            <a:ext cx="1828800" cy="320040"/>
           </a:xfrm>
           <a:prstGeom prst="rect">
             <a:avLst/>
@@ -18155,134 +18155,8 @@
         </p:nvSpPr>
         <p:spPr>
           <a:xfrm>
-            <a:off x="7680960" y="2377440"/>
+            <a:off x="7680960" y="2560320"/>
             <a:ext cx="640080" cy="0"/>
-          </a:xfrm>
-          <a:prstGeom prst="line">
-            <a:avLst/>
-          </a:prstGeom>
-          <a:noFill/>
-          <a:ln w="19050">
-            <a:solidFill>
-              <a:srgbClr val="9AA0AC"/>
-            </a:solidFill>
-            <a:prstDash val="solid"/>
-            <a:tailEnd type="triangle"/>
-          </a:ln>
-        </p:spPr>
-      </p:sp>
-      <p:sp>
-        <p:nvSpPr>
-          <p:cNvPr id="16" name="Text 14"/>
-          <p:cNvSpPr/>
-          <p:nvPr/>
-        </p:nvSpPr>
-        <p:spPr>
-          <a:xfrm>
-            <a:off x="7223760" y="1828800"/>
-            <a:ext cx="1554480" cy="320040"/>
-          </a:xfrm>
-          <a:prstGeom prst="rect">
-            <a:avLst/>
-          </a:prstGeom>
-          <a:noFill/>
-          <a:ln/>
-        </p:spPr>
-        <p:txBody>
-          <a:bodyPr wrap="square" rtlCol="0" anchor="ctr"/>
-          <a:lstStyle/>
-          <a:p>
-            <a:pPr algn="ctr" indent="0" marL="0">
-              <a:buNone/>
-            </a:pPr>
-            <a:r>
-              <a:rPr lang="en-US" sz="1050" b="1" dirty="0">
-                <a:solidFill>
-                  <a:srgbClr val="3B4CCA"/>
-                </a:solidFill>
-                <a:latin typeface="Meiryo" pitchFamily="34" charset="0"/>
-                <a:ea typeface="Meiryo" pitchFamily="34" charset="-122"/>
-                <a:cs typeface="Meiryo" pitchFamily="34" charset="-120"/>
-              </a:rPr>
-              <a:t>④ ポイント還元 P</a:t>
-            </a:r>
-            <a:endParaRPr lang="en-US" sz="1050" dirty="0"/>
-          </a:p>
-        </p:txBody>
-      </p:sp>
-      <p:sp>
-        <p:nvSpPr>
-          <p:cNvPr id="17" name="Shape 15"/>
-          <p:cNvSpPr/>
-          <p:nvPr/>
-        </p:nvSpPr>
-        <p:spPr>
-          <a:xfrm>
-            <a:off x="9921240" y="3017520"/>
-            <a:ext cx="0" cy="1280160"/>
-          </a:xfrm>
-          <a:prstGeom prst="line">
-            <a:avLst/>
-          </a:prstGeom>
-          <a:noFill/>
-          <a:ln w="19050">
-            <a:solidFill>
-              <a:srgbClr val="9AA0AC"/>
-            </a:solidFill>
-            <a:prstDash val="solid"/>
-            <a:tailEnd type="triangle"/>
-          </a:ln>
-        </p:spPr>
-      </p:sp>
-      <p:sp>
-        <p:nvSpPr>
-          <p:cNvPr id="18" name="Text 16"/>
-          <p:cNvSpPr/>
-          <p:nvPr/>
-        </p:nvSpPr>
-        <p:spPr>
-          <a:xfrm>
-            <a:off x="8778240" y="3520440"/>
-            <a:ext cx="2377440" cy="320040"/>
-          </a:xfrm>
-          <a:prstGeom prst="rect">
-            <a:avLst/>
-          </a:prstGeom>
-          <a:noFill/>
-          <a:ln/>
-        </p:spPr>
-        <p:txBody>
-          <a:bodyPr wrap="square" rtlCol="0" anchor="ctr"/>
-          <a:lstStyle/>
-          <a:p>
-            <a:pPr algn="ctr" indent="0" marL="0">
-              <a:buNone/>
-            </a:pPr>
-            <a:r>
-              <a:rPr lang="en-US" sz="1050" b="1" dirty="0">
-                <a:solidFill>
-                  <a:srgbClr val="7A4FD0"/>
-                </a:solidFill>
-                <a:latin typeface="Meiryo" pitchFamily="34" charset="0"/>
-                <a:ea typeface="Meiryo" pitchFamily="34" charset="-122"/>
-                <a:cs typeface="Meiryo" pitchFamily="34" charset="-120"/>
-              </a:rPr>
-              <a:t>⑤ 貯めたPで交換申請</a:t>
-            </a:r>
-            <a:endParaRPr lang="en-US" sz="1050" dirty="0"/>
-          </a:p>
-        </p:txBody>
-      </p:sp>
-      <p:sp>
-        <p:nvSpPr>
-          <p:cNvPr id="19" name="Shape 17"/>
-          <p:cNvSpPr/>
-          <p:nvPr/>
-        </p:nvSpPr>
-        <p:spPr>
-          <a:xfrm>
-            <a:off x="6080760" y="3931920"/>
-            <a:ext cx="0" cy="1005840"/>
           </a:xfrm>
           <a:prstGeom prst="line">
             <a:avLst/>
@@ -18294,19 +18168,20 @@
             </a:solidFill>
             <a:prstDash val="solid"/>
             <a:headEnd type="triangle"/>
+            <a:tailEnd type="triangle"/>
           </a:ln>
         </p:spPr>
       </p:sp>
       <p:sp>
         <p:nvSpPr>
-          <p:cNvPr id="20" name="Text 18"/>
-          <p:cNvSpPr/>
-          <p:nvPr/>
-        </p:nvSpPr>
-        <p:spPr>
-          <a:xfrm>
-            <a:off x="6172200" y="4206240"/>
-            <a:ext cx="2743200" cy="320040"/>
+          <p:cNvPr id="16" name="Text 14"/>
+          <p:cNvSpPr/>
+          <p:nvPr/>
+        </p:nvSpPr>
+        <p:spPr>
+          <a:xfrm>
+            <a:off x="6949440" y="1874520"/>
+            <a:ext cx="2103120" cy="320040"/>
           </a:xfrm>
           <a:prstGeom prst="rect">
             <a:avLst/>
@@ -18324,13 +18199,13 @@
             <a:r>
               <a:rPr lang="en-US" sz="1050" b="1" dirty="0">
                 <a:solidFill>
-                  <a:srgbClr val="C79A3A"/>
-                </a:solidFill>
-                <a:latin typeface="Meiryo" pitchFamily="34" charset="0"/>
-                <a:ea typeface="Meiryo" pitchFamily="34" charset="-122"/>
-                <a:cs typeface="Meiryo" pitchFamily="34" charset="-120"/>
-              </a:rPr>
-              <a:t>⑥ アイテム付与 ／ ⑦ コード精算 ¥</a:t>
+                  <a:srgbClr val="3B4CCA"/>
+                </a:solidFill>
+                <a:latin typeface="Meiryo" pitchFamily="34" charset="0"/>
+                <a:ea typeface="Meiryo" pitchFamily="34" charset="-122"/>
+                <a:cs typeface="Meiryo" pitchFamily="34" charset="-120"/>
+              </a:rPr>
+              <a:t>④ ポイント還元 P</a:t>
             </a:r>
             <a:endParaRPr lang="en-US" sz="1050" dirty="0"/>
           </a:p>
@@ -18338,14 +18213,53 @@
       </p:sp>
       <p:sp>
         <p:nvSpPr>
-          <p:cNvPr id="21" name="Shape 19"/>
-          <p:cNvSpPr/>
-          <p:nvPr/>
-        </p:nvSpPr>
-        <p:spPr>
-          <a:xfrm>
-            <a:off x="3566160" y="5394960"/>
-            <a:ext cx="914400" cy="0"/>
+          <p:cNvPr id="17" name="Text 15"/>
+          <p:cNvSpPr/>
+          <p:nvPr/>
+        </p:nvSpPr>
+        <p:spPr>
+          <a:xfrm>
+            <a:off x="6766560" y="3127248"/>
+            <a:ext cx="2468880" cy="320040"/>
+          </a:xfrm>
+          <a:prstGeom prst="rect">
+            <a:avLst/>
+          </a:prstGeom>
+          <a:noFill/>
+          <a:ln/>
+        </p:spPr>
+        <p:txBody>
+          <a:bodyPr wrap="square" rtlCol="0" anchor="ctr"/>
+          <a:lstStyle/>
+          <a:p>
+            <a:pPr algn="ctr" indent="0" marL="0">
+              <a:buNone/>
+            </a:pPr>
+            <a:r>
+              <a:rPr lang="en-US" sz="1050" b="1" dirty="0">
+                <a:solidFill>
+                  <a:srgbClr val="7A4FD0"/>
+                </a:solidFill>
+                <a:latin typeface="Meiryo" pitchFamily="34" charset="0"/>
+                <a:ea typeface="Meiryo" pitchFamily="34" charset="-122"/>
+                <a:cs typeface="Meiryo" pitchFamily="34" charset="-120"/>
+              </a:rPr>
+              <a:t>⑤ 貯めたPで交換申請</a:t>
+            </a:r>
+            <a:endParaRPr lang="en-US" sz="1050" dirty="0"/>
+          </a:p>
+        </p:txBody>
+      </p:sp>
+      <p:sp>
+        <p:nvSpPr>
+          <p:cNvPr id="18" name="Shape 16"/>
+          <p:cNvSpPr/>
+          <p:nvPr/>
+        </p:nvSpPr>
+        <p:spPr>
+          <a:xfrm>
+            <a:off x="6080760" y="3017520"/>
+            <a:ext cx="0" cy="1920240"/>
           </a:xfrm>
           <a:prstGeom prst="line">
             <a:avLst/>
@@ -18357,31 +18271,32 @@
             </a:solidFill>
             <a:prstDash val="solid"/>
             <a:headEnd type="triangle"/>
+            <a:tailEnd type="triangle"/>
           </a:ln>
         </p:spPr>
       </p:sp>
       <p:sp>
         <p:nvSpPr>
-          <p:cNvPr id="22" name="Text 20"/>
-          <p:cNvSpPr/>
-          <p:nvPr/>
-        </p:nvSpPr>
-        <p:spPr>
-          <a:xfrm>
-            <a:off x="1188720" y="5074920"/>
-            <a:ext cx="2926080" cy="320040"/>
-          </a:xfrm>
-          <a:prstGeom prst="rect">
-            <a:avLst/>
-          </a:prstGeom>
-          <a:noFill/>
-          <a:ln/>
-        </p:spPr>
-        <p:txBody>
-          <a:bodyPr wrap="square" rtlCol="0" anchor="ctr"/>
-          <a:lstStyle/>
-          <a:p>
-            <a:pPr algn="ctr" indent="0" marL="0">
+          <p:cNvPr id="19" name="Text 17"/>
+          <p:cNvSpPr/>
+          <p:nvPr/>
+        </p:nvSpPr>
+        <p:spPr>
+          <a:xfrm>
+            <a:off x="3063240" y="3840480"/>
+            <a:ext cx="2651760" cy="320040"/>
+          </a:xfrm>
+          <a:prstGeom prst="rect">
+            <a:avLst/>
+          </a:prstGeom>
+          <a:noFill/>
+          <a:ln/>
+        </p:spPr>
+        <p:txBody>
+          <a:bodyPr wrap="square" rtlCol="0" anchor="ctr"/>
+          <a:lstStyle/>
+          <a:p>
+            <a:pPr algn="r" indent="0" marL="0">
               <a:buNone/>
             </a:pPr>
             <a:r>
@@ -18401,7 +18316,46 @@
       </p:sp>
       <p:sp>
         <p:nvSpPr>
-          <p:cNvPr id="23" name="Shape 21"/>
+          <p:cNvPr id="20" name="Text 18"/>
+          <p:cNvSpPr/>
+          <p:nvPr/>
+        </p:nvSpPr>
+        <p:spPr>
+          <a:xfrm>
+            <a:off x="6355080" y="3840480"/>
+            <a:ext cx="3840480" cy="320040"/>
+          </a:xfrm>
+          <a:prstGeom prst="rect">
+            <a:avLst/>
+          </a:prstGeom>
+          <a:noFill/>
+          <a:ln/>
+        </p:spPr>
+        <p:txBody>
+          <a:bodyPr wrap="square" rtlCol="0" anchor="ctr"/>
+          <a:lstStyle/>
+          <a:p>
+            <a:pPr algn="l" indent="0" marL="0">
+              <a:buNone/>
+            </a:pPr>
+            <a:r>
+              <a:rPr lang="en-US" sz="1050" b="1" dirty="0">
+                <a:solidFill>
+                  <a:srgbClr val="C79A3A"/>
+                </a:solidFill>
+                <a:latin typeface="Meiryo" pitchFamily="34" charset="0"/>
+                <a:ea typeface="Meiryo" pitchFamily="34" charset="-122"/>
+                <a:cs typeface="Meiryo" pitchFamily="34" charset="-120"/>
+              </a:rPr>
+              <a:t>⑥ アイテム付与 ／ ⑦ コード精算 ¥</a:t>
+            </a:r>
+            <a:endParaRPr lang="en-US" sz="1050" dirty="0"/>
+          </a:p>
+        </p:txBody>
+      </p:sp>
+      <p:sp>
+        <p:nvSpPr>
+          <p:cNvPr id="21" name="Shape 19"/>
           <p:cNvSpPr/>
           <p:nvPr/>
         </p:nvSpPr>
@@ -18421,7 +18375,7 @@
       </p:sp>
       <p:sp>
         <p:nvSpPr>
-          <p:cNvPr id="24" name="Text 22"/>
+          <p:cNvPr id="22" name="Text 20"/>
           <p:cNvSpPr/>
           <p:nvPr/>
         </p:nvSpPr>
@@ -18502,7 +18456,7 @@
       </p:sp>
       <p:sp>
         <p:nvSpPr>
-          <p:cNvPr id="25" name="Text 23"/>
+          <p:cNvPr id="23" name="Text 21"/>
           <p:cNvSpPr/>
           <p:nvPr/>
         </p:nvSpPr>
@@ -18541,7 +18495,7 @@
       </p:sp>
       <p:sp>
         <p:nvSpPr>
-          <p:cNvPr id="26" name="Text 24"/>
+          <p:cNvPr id="24" name="Text 22"/>
           <p:cNvSpPr/>
           <p:nvPr/>
         </p:nvSpPr>
@@ -18580,7 +18534,7 @@
       </p:sp>
       <p:sp>
         <p:nvSpPr>
-          <p:cNvPr id="27" name="Text 25"/>
+          <p:cNvPr id="25" name="Text 23"/>
           <p:cNvSpPr/>
           <p:nvPr/>
         </p:nvSpPr>
